--- a/能不能.pptx
+++ b/能不能.pptx
@@ -105,6 +105,22 @@
       </a:defRPr>
     </a:lvl9pPr>
   </p:defaultTextStyle>
+  <p:extLst>
+    <p:ext uri="{EFAFB233-063F-42B5-8137-9DF3F51BA10A}">
+      <p15:sldGuideLst xmlns:p15="http://schemas.microsoft.com/office/powerpoint/2012/main">
+        <p15:guide id="1" orient="horz" pos="1620">
+          <p15:clr>
+            <a:srgbClr val="A4A3A4"/>
+          </p15:clr>
+        </p15:guide>
+        <p15:guide id="2" pos="2880">
+          <p15:clr>
+            <a:srgbClr val="A4A3A4"/>
+          </p15:clr>
+        </p15:guide>
+      </p15:sldGuideLst>
+    </p:ext>
+  </p:extLst>
 </p:presentation>
 </file>
 
@@ -146,7 +162,7 @@
           <a:lstStyle/>
           <a:p>
             <a:r>
-              <a:rPr lang="en-US" altLang="zh-TW" smtClean="0"/>
+              <a:rPr lang="en-US" altLang="zh-TW"/>
               <a:t>Click to edit Master title style</a:t>
             </a:r>
             <a:endParaRPr lang="zh-TW" altLang="en-US"/>
@@ -265,7 +281,7 @@
           </a:lstStyle>
           <a:p>
             <a:r>
-              <a:rPr lang="en-US" altLang="zh-TW" smtClean="0"/>
+              <a:rPr lang="en-US" altLang="zh-TW"/>
               <a:t>Click to edit Master subtitle style</a:t>
             </a:r>
             <a:endParaRPr lang="zh-TW" altLang="en-US"/>
@@ -290,7 +306,7 @@
             <a:fld id="{95AB9C0F-3E49-40C5-AA70-3D537DB63101}" type="datetimeFigureOut">
               <a:rPr lang="zh-TW" altLang="en-US" smtClean="0"/>
               <a:pPr/>
-              <a:t>2020/5/19</a:t>
+              <a:t>2026/1/31</a:t>
             </a:fld>
             <a:endParaRPr lang="zh-TW" altLang="en-US"/>
           </a:p>
@@ -380,7 +396,7 @@
           <a:lstStyle/>
           <a:p>
             <a:r>
-              <a:rPr lang="en-US" altLang="zh-TW" smtClean="0"/>
+              <a:rPr lang="en-US" altLang="zh-TW"/>
               <a:t>Click to edit Master title style</a:t>
             </a:r>
             <a:endParaRPr lang="zh-TW" altLang="en-US"/>
@@ -404,35 +420,35 @@
           <a:p>
             <a:pPr lvl="0"/>
             <a:r>
-              <a:rPr lang="en-US" altLang="zh-TW" smtClean="0"/>
+              <a:rPr lang="en-US" altLang="zh-TW"/>
               <a:t>Click to edit Master text styles</a:t>
             </a:r>
           </a:p>
           <a:p>
             <a:pPr lvl="1"/>
             <a:r>
-              <a:rPr lang="en-US" altLang="zh-TW" smtClean="0"/>
+              <a:rPr lang="en-US" altLang="zh-TW"/>
               <a:t>Second level</a:t>
             </a:r>
           </a:p>
           <a:p>
             <a:pPr lvl="2"/>
             <a:r>
-              <a:rPr lang="en-US" altLang="zh-TW" smtClean="0"/>
+              <a:rPr lang="en-US" altLang="zh-TW"/>
               <a:t>Third level</a:t>
             </a:r>
           </a:p>
           <a:p>
             <a:pPr lvl="3"/>
             <a:r>
-              <a:rPr lang="en-US" altLang="zh-TW" smtClean="0"/>
+              <a:rPr lang="en-US" altLang="zh-TW"/>
               <a:t>Fourth level</a:t>
             </a:r>
           </a:p>
           <a:p>
             <a:pPr lvl="4"/>
             <a:r>
-              <a:rPr lang="en-US" altLang="zh-TW" smtClean="0"/>
+              <a:rPr lang="en-US" altLang="zh-TW"/>
               <a:t>Fifth level</a:t>
             </a:r>
             <a:endParaRPr lang="zh-TW" altLang="en-US"/>
@@ -457,7 +473,7 @@
             <a:fld id="{95AB9C0F-3E49-40C5-AA70-3D537DB63101}" type="datetimeFigureOut">
               <a:rPr lang="zh-TW" altLang="en-US" smtClean="0"/>
               <a:pPr/>
-              <a:t>2020/5/19</a:t>
+              <a:t>2026/1/31</a:t>
             </a:fld>
             <a:endParaRPr lang="zh-TW" altLang="en-US"/>
           </a:p>
@@ -552,7 +568,7 @@
           <a:lstStyle/>
           <a:p>
             <a:r>
-              <a:rPr lang="en-US" altLang="zh-TW" smtClean="0"/>
+              <a:rPr lang="en-US" altLang="zh-TW"/>
               <a:t>Click to edit Master title style</a:t>
             </a:r>
             <a:endParaRPr lang="zh-TW" altLang="en-US"/>
@@ -581,35 +597,35 @@
           <a:p>
             <a:pPr lvl="0"/>
             <a:r>
-              <a:rPr lang="en-US" altLang="zh-TW" smtClean="0"/>
+              <a:rPr lang="en-US" altLang="zh-TW"/>
               <a:t>Click to edit Master text styles</a:t>
             </a:r>
           </a:p>
           <a:p>
             <a:pPr lvl="1"/>
             <a:r>
-              <a:rPr lang="en-US" altLang="zh-TW" smtClean="0"/>
+              <a:rPr lang="en-US" altLang="zh-TW"/>
               <a:t>Second level</a:t>
             </a:r>
           </a:p>
           <a:p>
             <a:pPr lvl="2"/>
             <a:r>
-              <a:rPr lang="en-US" altLang="zh-TW" smtClean="0"/>
+              <a:rPr lang="en-US" altLang="zh-TW"/>
               <a:t>Third level</a:t>
             </a:r>
           </a:p>
           <a:p>
             <a:pPr lvl="3"/>
             <a:r>
-              <a:rPr lang="en-US" altLang="zh-TW" smtClean="0"/>
+              <a:rPr lang="en-US" altLang="zh-TW"/>
               <a:t>Fourth level</a:t>
             </a:r>
           </a:p>
           <a:p>
             <a:pPr lvl="4"/>
             <a:r>
-              <a:rPr lang="en-US" altLang="zh-TW" smtClean="0"/>
+              <a:rPr lang="en-US" altLang="zh-TW"/>
               <a:t>Fifth level</a:t>
             </a:r>
             <a:endParaRPr lang="zh-TW" altLang="en-US"/>
@@ -634,7 +650,7 @@
             <a:fld id="{95AB9C0F-3E49-40C5-AA70-3D537DB63101}" type="datetimeFigureOut">
               <a:rPr lang="zh-TW" altLang="en-US" smtClean="0"/>
               <a:pPr/>
-              <a:t>2020/5/19</a:t>
+              <a:t>2026/1/31</a:t>
             </a:fld>
             <a:endParaRPr lang="zh-TW" altLang="en-US"/>
           </a:p>
@@ -724,7 +740,7 @@
           <a:lstStyle/>
           <a:p>
             <a:r>
-              <a:rPr lang="en-US" altLang="zh-TW" smtClean="0"/>
+              <a:rPr lang="en-US" altLang="zh-TW"/>
               <a:t>Click to edit Master title style</a:t>
             </a:r>
             <a:endParaRPr lang="zh-TW" altLang="en-US"/>
@@ -748,35 +764,35 @@
           <a:p>
             <a:pPr lvl="0"/>
             <a:r>
-              <a:rPr lang="en-US" altLang="zh-TW" smtClean="0"/>
+              <a:rPr lang="en-US" altLang="zh-TW"/>
               <a:t>Click to edit Master text styles</a:t>
             </a:r>
           </a:p>
           <a:p>
             <a:pPr lvl="1"/>
             <a:r>
-              <a:rPr lang="en-US" altLang="zh-TW" smtClean="0"/>
+              <a:rPr lang="en-US" altLang="zh-TW"/>
               <a:t>Second level</a:t>
             </a:r>
           </a:p>
           <a:p>
             <a:pPr lvl="2"/>
             <a:r>
-              <a:rPr lang="en-US" altLang="zh-TW" smtClean="0"/>
+              <a:rPr lang="en-US" altLang="zh-TW"/>
               <a:t>Third level</a:t>
             </a:r>
           </a:p>
           <a:p>
             <a:pPr lvl="3"/>
             <a:r>
-              <a:rPr lang="en-US" altLang="zh-TW" smtClean="0"/>
+              <a:rPr lang="en-US" altLang="zh-TW"/>
               <a:t>Fourth level</a:t>
             </a:r>
           </a:p>
           <a:p>
             <a:pPr lvl="4"/>
             <a:r>
-              <a:rPr lang="en-US" altLang="zh-TW" smtClean="0"/>
+              <a:rPr lang="en-US" altLang="zh-TW"/>
               <a:t>Fifth level</a:t>
             </a:r>
             <a:endParaRPr lang="zh-TW" altLang="en-US"/>
@@ -801,7 +817,7 @@
             <a:fld id="{95AB9C0F-3E49-40C5-AA70-3D537DB63101}" type="datetimeFigureOut">
               <a:rPr lang="zh-TW" altLang="en-US" smtClean="0"/>
               <a:pPr/>
-              <a:t>2020/5/19</a:t>
+              <a:t>2026/1/31</a:t>
             </a:fld>
             <a:endParaRPr lang="zh-TW" altLang="en-US"/>
           </a:p>
@@ -900,7 +916,7 @@
           </a:lstStyle>
           <a:p>
             <a:r>
-              <a:rPr lang="en-US" altLang="zh-TW" smtClean="0"/>
+              <a:rPr lang="en-US" altLang="zh-TW"/>
               <a:t>Click to edit Master title style</a:t>
             </a:r>
             <a:endParaRPr lang="zh-TW" altLang="en-US"/>
@@ -1020,7 +1036,7 @@
           <a:p>
             <a:pPr lvl="0"/>
             <a:r>
-              <a:rPr lang="en-US" altLang="zh-TW" smtClean="0"/>
+              <a:rPr lang="en-US" altLang="zh-TW"/>
               <a:t>Click to edit Master text styles</a:t>
             </a:r>
           </a:p>
@@ -1044,7 +1060,7 @@
             <a:fld id="{95AB9C0F-3E49-40C5-AA70-3D537DB63101}" type="datetimeFigureOut">
               <a:rPr lang="zh-TW" altLang="en-US" smtClean="0"/>
               <a:pPr/>
-              <a:t>2020/5/19</a:t>
+              <a:t>2026/1/31</a:t>
             </a:fld>
             <a:endParaRPr lang="zh-TW" altLang="en-US"/>
           </a:p>
@@ -1134,7 +1150,7 @@
           <a:lstStyle/>
           <a:p>
             <a:r>
-              <a:rPr lang="en-US" altLang="zh-TW" smtClean="0"/>
+              <a:rPr lang="en-US" altLang="zh-TW"/>
               <a:t>Click to edit Master title style</a:t>
             </a:r>
             <a:endParaRPr lang="zh-TW" altLang="en-US"/>
@@ -1191,35 +1207,35 @@
           <a:p>
             <a:pPr lvl="0"/>
             <a:r>
-              <a:rPr lang="en-US" altLang="zh-TW" smtClean="0"/>
+              <a:rPr lang="en-US" altLang="zh-TW"/>
               <a:t>Click to edit Master text styles</a:t>
             </a:r>
           </a:p>
           <a:p>
             <a:pPr lvl="1"/>
             <a:r>
-              <a:rPr lang="en-US" altLang="zh-TW" smtClean="0"/>
+              <a:rPr lang="en-US" altLang="zh-TW"/>
               <a:t>Second level</a:t>
             </a:r>
           </a:p>
           <a:p>
             <a:pPr lvl="2"/>
             <a:r>
-              <a:rPr lang="en-US" altLang="zh-TW" smtClean="0"/>
+              <a:rPr lang="en-US" altLang="zh-TW"/>
               <a:t>Third level</a:t>
             </a:r>
           </a:p>
           <a:p>
             <a:pPr lvl="3"/>
             <a:r>
-              <a:rPr lang="en-US" altLang="zh-TW" smtClean="0"/>
+              <a:rPr lang="en-US" altLang="zh-TW"/>
               <a:t>Fourth level</a:t>
             </a:r>
           </a:p>
           <a:p>
             <a:pPr lvl="4"/>
             <a:r>
-              <a:rPr lang="en-US" altLang="zh-TW" smtClean="0"/>
+              <a:rPr lang="en-US" altLang="zh-TW"/>
               <a:t>Fifth level</a:t>
             </a:r>
             <a:endParaRPr lang="zh-TW" altLang="en-US"/>
@@ -1276,35 +1292,35 @@
           <a:p>
             <a:pPr lvl="0"/>
             <a:r>
-              <a:rPr lang="en-US" altLang="zh-TW" smtClean="0"/>
+              <a:rPr lang="en-US" altLang="zh-TW"/>
               <a:t>Click to edit Master text styles</a:t>
             </a:r>
           </a:p>
           <a:p>
             <a:pPr lvl="1"/>
             <a:r>
-              <a:rPr lang="en-US" altLang="zh-TW" smtClean="0"/>
+              <a:rPr lang="en-US" altLang="zh-TW"/>
               <a:t>Second level</a:t>
             </a:r>
           </a:p>
           <a:p>
             <a:pPr lvl="2"/>
             <a:r>
-              <a:rPr lang="en-US" altLang="zh-TW" smtClean="0"/>
+              <a:rPr lang="en-US" altLang="zh-TW"/>
               <a:t>Third level</a:t>
             </a:r>
           </a:p>
           <a:p>
             <a:pPr lvl="3"/>
             <a:r>
-              <a:rPr lang="en-US" altLang="zh-TW" smtClean="0"/>
+              <a:rPr lang="en-US" altLang="zh-TW"/>
               <a:t>Fourth level</a:t>
             </a:r>
           </a:p>
           <a:p>
             <a:pPr lvl="4"/>
             <a:r>
-              <a:rPr lang="en-US" altLang="zh-TW" smtClean="0"/>
+              <a:rPr lang="en-US" altLang="zh-TW"/>
               <a:t>Fifth level</a:t>
             </a:r>
             <a:endParaRPr lang="zh-TW" altLang="en-US"/>
@@ -1329,7 +1345,7 @@
             <a:fld id="{95AB9C0F-3E49-40C5-AA70-3D537DB63101}" type="datetimeFigureOut">
               <a:rPr lang="zh-TW" altLang="en-US" smtClean="0"/>
               <a:pPr/>
-              <a:t>2020/5/19</a:t>
+              <a:t>2026/1/31</a:t>
             </a:fld>
             <a:endParaRPr lang="zh-TW" altLang="en-US"/>
           </a:p>
@@ -1423,7 +1439,7 @@
           </a:lstStyle>
           <a:p>
             <a:r>
-              <a:rPr lang="en-US" altLang="zh-TW" smtClean="0"/>
+              <a:rPr lang="en-US" altLang="zh-TW"/>
               <a:t>Click to edit Master title style</a:t>
             </a:r>
             <a:endParaRPr lang="zh-TW" altLang="en-US"/>
@@ -1489,7 +1505,7 @@
           <a:p>
             <a:pPr lvl="0"/>
             <a:r>
-              <a:rPr lang="en-US" altLang="zh-TW" smtClean="0"/>
+              <a:rPr lang="en-US" altLang="zh-TW"/>
               <a:t>Click to edit Master text styles</a:t>
             </a:r>
           </a:p>
@@ -1545,35 +1561,35 @@
           <a:p>
             <a:pPr lvl="0"/>
             <a:r>
-              <a:rPr lang="en-US" altLang="zh-TW" smtClean="0"/>
+              <a:rPr lang="en-US" altLang="zh-TW"/>
               <a:t>Click to edit Master text styles</a:t>
             </a:r>
           </a:p>
           <a:p>
             <a:pPr lvl="1"/>
             <a:r>
-              <a:rPr lang="en-US" altLang="zh-TW" smtClean="0"/>
+              <a:rPr lang="en-US" altLang="zh-TW"/>
               <a:t>Second level</a:t>
             </a:r>
           </a:p>
           <a:p>
             <a:pPr lvl="2"/>
             <a:r>
-              <a:rPr lang="en-US" altLang="zh-TW" smtClean="0"/>
+              <a:rPr lang="en-US" altLang="zh-TW"/>
               <a:t>Third level</a:t>
             </a:r>
           </a:p>
           <a:p>
             <a:pPr lvl="3"/>
             <a:r>
-              <a:rPr lang="en-US" altLang="zh-TW" smtClean="0"/>
+              <a:rPr lang="en-US" altLang="zh-TW"/>
               <a:t>Fourth level</a:t>
             </a:r>
           </a:p>
           <a:p>
             <a:pPr lvl="4"/>
             <a:r>
-              <a:rPr lang="en-US" altLang="zh-TW" smtClean="0"/>
+              <a:rPr lang="en-US" altLang="zh-TW"/>
               <a:t>Fifth level</a:t>
             </a:r>
             <a:endParaRPr lang="zh-TW" altLang="en-US"/>
@@ -1639,7 +1655,7 @@
           <a:p>
             <a:pPr lvl="0"/>
             <a:r>
-              <a:rPr lang="en-US" altLang="zh-TW" smtClean="0"/>
+              <a:rPr lang="en-US" altLang="zh-TW"/>
               <a:t>Click to edit Master text styles</a:t>
             </a:r>
           </a:p>
@@ -1695,35 +1711,35 @@
           <a:p>
             <a:pPr lvl="0"/>
             <a:r>
-              <a:rPr lang="en-US" altLang="zh-TW" smtClean="0"/>
+              <a:rPr lang="en-US" altLang="zh-TW"/>
               <a:t>Click to edit Master text styles</a:t>
             </a:r>
           </a:p>
           <a:p>
             <a:pPr lvl="1"/>
             <a:r>
-              <a:rPr lang="en-US" altLang="zh-TW" smtClean="0"/>
+              <a:rPr lang="en-US" altLang="zh-TW"/>
               <a:t>Second level</a:t>
             </a:r>
           </a:p>
           <a:p>
             <a:pPr lvl="2"/>
             <a:r>
-              <a:rPr lang="en-US" altLang="zh-TW" smtClean="0"/>
+              <a:rPr lang="en-US" altLang="zh-TW"/>
               <a:t>Third level</a:t>
             </a:r>
           </a:p>
           <a:p>
             <a:pPr lvl="3"/>
             <a:r>
-              <a:rPr lang="en-US" altLang="zh-TW" smtClean="0"/>
+              <a:rPr lang="en-US" altLang="zh-TW"/>
               <a:t>Fourth level</a:t>
             </a:r>
           </a:p>
           <a:p>
             <a:pPr lvl="4"/>
             <a:r>
-              <a:rPr lang="en-US" altLang="zh-TW" smtClean="0"/>
+              <a:rPr lang="en-US" altLang="zh-TW"/>
               <a:t>Fifth level</a:t>
             </a:r>
             <a:endParaRPr lang="zh-TW" altLang="en-US"/>
@@ -1748,7 +1764,7 @@
             <a:fld id="{95AB9C0F-3E49-40C5-AA70-3D537DB63101}" type="datetimeFigureOut">
               <a:rPr lang="zh-TW" altLang="en-US" smtClean="0"/>
               <a:pPr/>
-              <a:t>2020/5/19</a:t>
+              <a:t>2026/1/31</a:t>
             </a:fld>
             <a:endParaRPr lang="zh-TW" altLang="en-US"/>
           </a:p>
@@ -1838,7 +1854,7 @@
           <a:lstStyle/>
           <a:p>
             <a:r>
-              <a:rPr lang="en-US" altLang="zh-TW" smtClean="0"/>
+              <a:rPr lang="en-US" altLang="zh-TW"/>
               <a:t>Click to edit Master title style</a:t>
             </a:r>
             <a:endParaRPr lang="zh-TW" altLang="en-US"/>
@@ -1863,7 +1879,7 @@
             <a:fld id="{95AB9C0F-3E49-40C5-AA70-3D537DB63101}" type="datetimeFigureOut">
               <a:rPr lang="zh-TW" altLang="en-US" smtClean="0"/>
               <a:pPr/>
-              <a:t>2020/5/19</a:t>
+              <a:t>2026/1/31</a:t>
             </a:fld>
             <a:endParaRPr lang="zh-TW" altLang="en-US"/>
           </a:p>
@@ -1955,7 +1971,7 @@
             <a:fld id="{95AB9C0F-3E49-40C5-AA70-3D537DB63101}" type="datetimeFigureOut">
               <a:rPr lang="zh-TW" altLang="en-US" smtClean="0"/>
               <a:pPr/>
-              <a:t>2020/5/19</a:t>
+              <a:t>2026/1/31</a:t>
             </a:fld>
             <a:endParaRPr lang="zh-TW" altLang="en-US"/>
           </a:p>
@@ -2054,7 +2070,7 @@
           </a:lstStyle>
           <a:p>
             <a:r>
-              <a:rPr lang="en-US" altLang="zh-TW" smtClean="0"/>
+              <a:rPr lang="en-US" altLang="zh-TW"/>
               <a:t>Click to edit Master title style</a:t>
             </a:r>
             <a:endParaRPr lang="zh-TW" altLang="en-US"/>
@@ -2111,35 +2127,35 @@
           <a:p>
             <a:pPr lvl="0"/>
             <a:r>
-              <a:rPr lang="en-US" altLang="zh-TW" smtClean="0"/>
+              <a:rPr lang="en-US" altLang="zh-TW"/>
               <a:t>Click to edit Master text styles</a:t>
             </a:r>
           </a:p>
           <a:p>
             <a:pPr lvl="1"/>
             <a:r>
-              <a:rPr lang="en-US" altLang="zh-TW" smtClean="0"/>
+              <a:rPr lang="en-US" altLang="zh-TW"/>
               <a:t>Second level</a:t>
             </a:r>
           </a:p>
           <a:p>
             <a:pPr lvl="2"/>
             <a:r>
-              <a:rPr lang="en-US" altLang="zh-TW" smtClean="0"/>
+              <a:rPr lang="en-US" altLang="zh-TW"/>
               <a:t>Third level</a:t>
             </a:r>
           </a:p>
           <a:p>
             <a:pPr lvl="3"/>
             <a:r>
-              <a:rPr lang="en-US" altLang="zh-TW" smtClean="0"/>
+              <a:rPr lang="en-US" altLang="zh-TW"/>
               <a:t>Fourth level</a:t>
             </a:r>
           </a:p>
           <a:p>
             <a:pPr lvl="4"/>
             <a:r>
-              <a:rPr lang="en-US" altLang="zh-TW" smtClean="0"/>
+              <a:rPr lang="en-US" altLang="zh-TW"/>
               <a:t>Fifth level</a:t>
             </a:r>
             <a:endParaRPr lang="zh-TW" altLang="en-US"/>
@@ -2205,7 +2221,7 @@
           <a:p>
             <a:pPr lvl="0"/>
             <a:r>
-              <a:rPr lang="en-US" altLang="zh-TW" smtClean="0"/>
+              <a:rPr lang="en-US" altLang="zh-TW"/>
               <a:t>Click to edit Master text styles</a:t>
             </a:r>
           </a:p>
@@ -2229,7 +2245,7 @@
             <a:fld id="{95AB9C0F-3E49-40C5-AA70-3D537DB63101}" type="datetimeFigureOut">
               <a:rPr lang="zh-TW" altLang="en-US" smtClean="0"/>
               <a:pPr/>
-              <a:t>2020/5/19</a:t>
+              <a:t>2026/1/31</a:t>
             </a:fld>
             <a:endParaRPr lang="zh-TW" altLang="en-US"/>
           </a:p>
@@ -2328,7 +2344,7 @@
           </a:lstStyle>
           <a:p>
             <a:r>
-              <a:rPr lang="en-US" altLang="zh-TW" smtClean="0"/>
+              <a:rPr lang="en-US" altLang="zh-TW"/>
               <a:t>Click to edit Master title style</a:t>
             </a:r>
             <a:endParaRPr lang="zh-TW" altLang="en-US"/>
@@ -2393,7 +2409,7 @@
           </a:lstStyle>
           <a:p>
             <a:r>
-              <a:rPr lang="en-US" altLang="zh-TW" smtClean="0"/>
+              <a:rPr lang="en-US" altLang="zh-TW"/>
               <a:t>Click icon to add picture</a:t>
             </a:r>
             <a:endParaRPr lang="zh-TW" altLang="en-US"/>
@@ -2459,7 +2475,7 @@
           <a:p>
             <a:pPr lvl="0"/>
             <a:r>
-              <a:rPr lang="en-US" altLang="zh-TW" smtClean="0"/>
+              <a:rPr lang="en-US" altLang="zh-TW"/>
               <a:t>Click to edit Master text styles</a:t>
             </a:r>
           </a:p>
@@ -2483,7 +2499,7 @@
             <a:fld id="{95AB9C0F-3E49-40C5-AA70-3D537DB63101}" type="datetimeFigureOut">
               <a:rPr lang="zh-TW" altLang="en-US" smtClean="0"/>
               <a:pPr/>
-              <a:t>2020/5/19</a:t>
+              <a:t>2026/1/31</a:t>
             </a:fld>
             <a:endParaRPr lang="zh-TW" altLang="en-US"/>
           </a:p>
@@ -2593,10 +2609,9 @@
           <a:lstStyle/>
           <a:p>
             <a:r>
-              <a:rPr lang="zh-TW" altLang="en-US" smtClean="0"/>
+              <a:rPr lang="zh-TW" altLang="en-US"/>
               <a:t>按一下以編輯母片標題樣式</a:t>
             </a:r>
-            <a:endParaRPr lang="zh-TW" altLang="en-US"/>
           </a:p>
         </p:txBody>
       </p:sp>
@@ -2627,38 +2642,37 @@
           <a:p>
             <a:pPr lvl="0"/>
             <a:r>
-              <a:rPr lang="zh-TW" altLang="en-US" smtClean="0"/>
+              <a:rPr lang="zh-TW" altLang="en-US"/>
               <a:t>按一下以編輯母片文字樣式</a:t>
             </a:r>
           </a:p>
           <a:p>
             <a:pPr lvl="1"/>
             <a:r>
-              <a:rPr lang="zh-TW" altLang="en-US" smtClean="0"/>
+              <a:rPr lang="zh-TW" altLang="en-US"/>
               <a:t>第二層</a:t>
             </a:r>
           </a:p>
           <a:p>
             <a:pPr lvl="2"/>
             <a:r>
-              <a:rPr lang="zh-TW" altLang="en-US" smtClean="0"/>
+              <a:rPr lang="zh-TW" altLang="en-US"/>
               <a:t>第三層</a:t>
             </a:r>
           </a:p>
           <a:p>
             <a:pPr lvl="3"/>
             <a:r>
-              <a:rPr lang="zh-TW" altLang="en-US" smtClean="0"/>
+              <a:rPr lang="zh-TW" altLang="en-US"/>
               <a:t>第四層</a:t>
             </a:r>
           </a:p>
           <a:p>
             <a:pPr lvl="4"/>
             <a:r>
-              <a:rPr lang="zh-TW" altLang="en-US" smtClean="0"/>
+              <a:rPr lang="zh-TW" altLang="en-US"/>
               <a:t>第五層</a:t>
             </a:r>
-            <a:endParaRPr lang="zh-TW" altLang="en-US"/>
           </a:p>
         </p:txBody>
       </p:sp>
@@ -2698,7 +2712,7 @@
             <a:fld id="{95AB9C0F-3E49-40C5-AA70-3D537DB63101}" type="datetimeFigureOut">
               <a:rPr lang="zh-TW" altLang="en-US" smtClean="0"/>
               <a:pPr/>
-              <a:t>2020/5/19</a:t>
+              <a:t>2026/1/31</a:t>
             </a:fld>
             <a:endParaRPr lang="zh-TW" altLang="en-US"/>
           </a:p>
@@ -3126,44 +3140,23 @@
                 <a:latin typeface="Microsoft JhengHei" pitchFamily="34" charset="-120"/>
                 <a:ea typeface="Microsoft JhengHei" pitchFamily="34" charset="-120"/>
               </a:rPr>
-              <a:t>我</a:t>
-            </a:r>
-            <a:r>
-              <a:rPr lang="zh-TW" altLang="en-US" sz="4800" b="1" dirty="0" smtClean="0">
+              <a:t>我屬於</a:t>
+            </a:r>
+            <a:r>
+              <a:rPr lang="zh-CN" altLang="en-US" sz="4800" b="1" dirty="0">
                 <a:latin typeface="Microsoft JhengHei" pitchFamily="34" charset="-120"/>
                 <a:ea typeface="Microsoft JhengHei" pitchFamily="34" charset="-120"/>
               </a:rPr>
-              <a:t>屬於</a:t>
-            </a:r>
-            <a:r>
-              <a:rPr lang="zh-CN" altLang="en-US" sz="4800" b="1" dirty="0" smtClean="0">
-                <a:latin typeface="Microsoft JhengHei" pitchFamily="34" charset="-120"/>
-                <a:ea typeface="Microsoft JhengHei" pitchFamily="34" charset="-120"/>
-              </a:rPr>
-              <a:t>袮  袮</a:t>
-            </a:r>
-            <a:r>
-              <a:rPr lang="zh-TW" altLang="en-US" sz="4800" b="1" dirty="0" smtClean="0">
-                <a:latin typeface="Microsoft JhengHei" pitchFamily="34" charset="-120"/>
-                <a:ea typeface="Microsoft JhengHei" pitchFamily="34" charset="-120"/>
-              </a:rPr>
-              <a:t>是</a:t>
+              <a:t>祢  祢</a:t>
             </a:r>
             <a:r>
               <a:rPr lang="zh-TW" altLang="en-US" sz="4800" b="1" dirty="0">
                 <a:latin typeface="Microsoft JhengHei" pitchFamily="34" charset="-120"/>
                 <a:ea typeface="Microsoft JhengHei" pitchFamily="34" charset="-120"/>
               </a:rPr>
-              <a:t>我永遠的</a:t>
-            </a:r>
-            <a:r>
-              <a:rPr lang="zh-TW" altLang="en-US" sz="4800" b="1" dirty="0" smtClean="0">
-                <a:latin typeface="Microsoft JhengHei" pitchFamily="34" charset="-120"/>
-                <a:ea typeface="Microsoft JhengHei" pitchFamily="34" charset="-120"/>
-              </a:rPr>
-              <a:t>福分</a:t>
-            </a:r>
-            <a:endParaRPr lang="en-US" altLang="zh-TW" sz="4800" b="1" dirty="0" smtClean="0">
+              <a:t>是我永遠的福分</a:t>
+            </a:r>
+            <a:endParaRPr lang="en-US" altLang="zh-TW" sz="4800" b="1" dirty="0">
               <a:latin typeface="Microsoft JhengHei" pitchFamily="34" charset="-120"/>
               <a:ea typeface="Microsoft JhengHei" pitchFamily="34" charset="-120"/>
             </a:endParaRPr>
@@ -3172,56 +3165,28 @@
             <a:pPr algn="ctr">
               <a:buNone/>
             </a:pPr>
-            <a:r>
-              <a:rPr lang="zh-TW" altLang="en-US" sz="4800" b="1" dirty="0" smtClean="0">
-                <a:latin typeface="Microsoft JhengHei" pitchFamily="34" charset="-120"/>
-                <a:ea typeface="Microsoft JhengHei" pitchFamily="34" charset="-120"/>
-              </a:rPr>
-              <a:t>只想</a:t>
-            </a:r>
             <a:r>
               <a:rPr lang="zh-TW" altLang="en-US" sz="4800" b="1" dirty="0">
                 <a:latin typeface="Microsoft JhengHei" pitchFamily="34" charset="-120"/>
                 <a:ea typeface="Microsoft JhengHei" pitchFamily="34" charset="-120"/>
               </a:rPr>
-              <a:t>日夜</a:t>
-            </a:r>
-            <a:r>
-              <a:rPr lang="zh-TW" altLang="en-US" sz="4800" b="1" dirty="0" smtClean="0">
+              <a:t>只想日夜在</a:t>
+            </a:r>
+            <a:r>
+              <a:rPr lang="zh-CN" altLang="en-US" sz="4800" b="1" dirty="0">
                 <a:latin typeface="Microsoft JhengHei" pitchFamily="34" charset="-120"/>
                 <a:ea typeface="Microsoft JhengHei" pitchFamily="34" charset="-120"/>
               </a:rPr>
-              <a:t>在</a:t>
-            </a:r>
-            <a:r>
-              <a:rPr lang="zh-CN" altLang="en-US" sz="4800" b="1" dirty="0" smtClean="0">
-                <a:latin typeface="Microsoft JhengHei" pitchFamily="34" charset="-120"/>
-                <a:ea typeface="Microsoft JhengHei" pitchFamily="34" charset="-120"/>
-              </a:rPr>
-              <a:t>袮</a:t>
-            </a:r>
-            <a:r>
-              <a:rPr lang="zh-TW" altLang="en-US" sz="4800" b="1" dirty="0" smtClean="0">
-                <a:latin typeface="Microsoft JhengHei" pitchFamily="34" charset="-120"/>
-                <a:ea typeface="Microsoft JhengHei" pitchFamily="34" charset="-120"/>
-              </a:rPr>
-              <a:t>殿</a:t>
+              <a:t>祢</a:t>
             </a:r>
             <a:r>
               <a:rPr lang="zh-TW" altLang="en-US" sz="4800" b="1" dirty="0">
                 <a:latin typeface="Microsoft JhengHei" pitchFamily="34" charset="-120"/>
                 <a:ea typeface="Microsoft JhengHei" pitchFamily="34" charset="-120"/>
               </a:rPr>
-              <a:t>中獻上敬</a:t>
-            </a:r>
-            <a:r>
-              <a:rPr lang="zh-TW" altLang="en-US" sz="4800" b="1" dirty="0" smtClean="0">
-                <a:latin typeface="Microsoft JhengHei" pitchFamily="34" charset="-120"/>
-                <a:ea typeface="Microsoft JhengHei" pitchFamily="34" charset="-120"/>
-              </a:rPr>
-              <a:t>拜</a:t>
-            </a:r>
-            <a:endParaRPr lang="en-US" altLang="zh-TW" sz="4800" b="1" dirty="0" smtClean="0">
+              <a:t>殿中獻上敬拜</a:t>
+            </a:r>
+            <a:endParaRPr lang="en-US" altLang="zh-TW" sz="4800" b="1" dirty="0">
               <a:latin typeface="Microsoft JhengHei" pitchFamily="34" charset="-120"/>
               <a:ea typeface="Microsoft JhengHei" pitchFamily="34" charset="-120"/>
             </a:endParaRPr>
@@ -3230,63 +3195,28 @@
             <a:pPr algn="ctr">
               <a:buNone/>
             </a:pPr>
-            <a:r>
-              <a:rPr lang="zh-TW" altLang="en-US" sz="4800" b="1" dirty="0" smtClean="0">
-                <a:latin typeface="Microsoft JhengHei" pitchFamily="34" charset="-120"/>
-                <a:ea typeface="Microsoft JhengHei" pitchFamily="34" charset="-120"/>
-              </a:rPr>
-              <a:t>定睛</a:t>
-            </a:r>
-            <a:r>
-              <a:rPr lang="zh-TW" altLang="en-US" sz="4800" b="1" dirty="0" smtClean="0">
-                <a:latin typeface="Microsoft JhengHei" pitchFamily="34" charset="-120"/>
-                <a:ea typeface="Microsoft JhengHei" pitchFamily="34" charset="-120"/>
-              </a:rPr>
-              <a:t>在</a:t>
-            </a:r>
-            <a:r>
-              <a:rPr lang="zh-CN" altLang="en-US" sz="4800" b="1" dirty="0" smtClean="0">
-                <a:latin typeface="Microsoft JhengHei" pitchFamily="34" charset="-120"/>
-                <a:ea typeface="Microsoft JhengHei" pitchFamily="34" charset="-120"/>
-              </a:rPr>
-              <a:t>袮</a:t>
-            </a:r>
-            <a:r>
-              <a:rPr lang="zh-TW" altLang="en-US" sz="4800" b="1" dirty="0" smtClean="0">
-                <a:latin typeface="Microsoft JhengHei" pitchFamily="34" charset="-120"/>
-                <a:ea typeface="Microsoft JhengHei" pitchFamily="34" charset="-120"/>
-              </a:rPr>
-              <a:t>的</a:t>
-            </a:r>
             <a:r>
               <a:rPr lang="zh-TW" altLang="en-US" sz="4800" b="1" dirty="0">
                 <a:latin typeface="Microsoft JhengHei" pitchFamily="34" charset="-120"/>
                 <a:ea typeface="Microsoft JhengHei" pitchFamily="34" charset="-120"/>
               </a:rPr>
-              <a:t>榮</a:t>
-            </a:r>
-            <a:r>
-              <a:rPr lang="zh-TW" altLang="en-US" sz="4800" b="1" dirty="0" smtClean="0">
+              <a:t>定睛在</a:t>
+            </a:r>
+            <a:r>
+              <a:rPr lang="zh-CN" altLang="en-US" sz="4800" b="1" dirty="0">
                 <a:latin typeface="Microsoft JhengHei" pitchFamily="34" charset="-120"/>
                 <a:ea typeface="Microsoft JhengHei" pitchFamily="34" charset="-120"/>
               </a:rPr>
-              <a:t>美  世</a:t>
+              <a:t>祢</a:t>
             </a:r>
             <a:r>
               <a:rPr lang="zh-TW" altLang="en-US" sz="4800" b="1" dirty="0">
                 <a:latin typeface="Microsoft JhengHei" pitchFamily="34" charset="-120"/>
                 <a:ea typeface="Microsoft JhengHei" pitchFamily="34" charset="-120"/>
               </a:rPr>
-              <a:t>上一切變</a:t>
-            </a:r>
-            <a:r>
-              <a:rPr lang="zh-TW" altLang="en-US" sz="4800" b="1" dirty="0" smtClean="0">
-                <a:latin typeface="Microsoft JhengHei" pitchFamily="34" charset="-120"/>
-                <a:ea typeface="Microsoft JhengHei" pitchFamily="34" charset="-120"/>
-              </a:rPr>
-              <a:t>暗淡</a:t>
-            </a:r>
-            <a:endParaRPr lang="en-US" altLang="zh-TW" sz="4800" b="1" dirty="0" smtClean="0">
+              <a:t>的榮美  世上一切變暗淡</a:t>
+            </a:r>
+            <a:endParaRPr lang="en-US" altLang="zh-TW" sz="4800" b="1" dirty="0">
               <a:latin typeface="Microsoft JhengHei" pitchFamily="34" charset="-120"/>
               <a:ea typeface="Microsoft JhengHei" pitchFamily="34" charset="-120"/>
             </a:endParaRPr>
@@ -3296,39 +3226,25 @@
               <a:buNone/>
             </a:pPr>
             <a:r>
-              <a:rPr lang="zh-TW" altLang="en-US" sz="4800" b="1" dirty="0" smtClean="0">
+              <a:rPr lang="zh-TW" altLang="en-US" sz="4800" b="1" dirty="0">
                 <a:latin typeface="Microsoft JhengHei" pitchFamily="34" charset="-120"/>
                 <a:ea typeface="Microsoft JhengHei" pitchFamily="34" charset="-120"/>
               </a:rPr>
               <a:t>除</a:t>
             </a:r>
             <a:r>
-              <a:rPr lang="zh-CN" altLang="en-US" sz="4800" b="1" dirty="0" smtClean="0">
+              <a:rPr lang="zh-CN" altLang="en-US" sz="4800" b="1" dirty="0">
                 <a:latin typeface="Microsoft JhengHei" pitchFamily="34" charset="-120"/>
                 <a:ea typeface="Microsoft JhengHei" pitchFamily="34" charset="-120"/>
               </a:rPr>
-              <a:t>袮</a:t>
-            </a:r>
-            <a:r>
-              <a:rPr lang="zh-TW" altLang="en-US" sz="4800" b="1" dirty="0" smtClean="0">
-                <a:latin typeface="Microsoft JhengHei" pitchFamily="34" charset="-120"/>
-                <a:ea typeface="Microsoft JhengHei" pitchFamily="34" charset="-120"/>
-              </a:rPr>
-              <a:t>以外  </a:t>
-            </a:r>
-            <a:r>
-              <a:rPr lang="zh-TW" altLang="en-US" sz="4800" b="1" dirty="0" smtClean="0">
-                <a:latin typeface="Microsoft JhengHei" pitchFamily="34" charset="-120"/>
-                <a:ea typeface="Microsoft JhengHei" pitchFamily="34" charset="-120"/>
-              </a:rPr>
-              <a:t>我</a:t>
+              <a:t>祢</a:t>
             </a:r>
             <a:r>
               <a:rPr lang="zh-TW" altLang="en-US" sz="4800" b="1" dirty="0">
                 <a:latin typeface="Microsoft JhengHei" pitchFamily="34" charset="-120"/>
                 <a:ea typeface="Microsoft JhengHei" pitchFamily="34" charset="-120"/>
               </a:rPr>
-              <a:t>還能有誰</a:t>
+              <a:t>以外  我還能有誰</a:t>
             </a:r>
           </a:p>
         </p:txBody>
@@ -3415,35 +3331,21 @@
                 <a:latin typeface="Microsoft JhengHei" pitchFamily="34" charset="-120"/>
                 <a:ea typeface="Microsoft JhengHei" pitchFamily="34" charset="-120"/>
               </a:rPr>
-              <a:t>能不</a:t>
-            </a:r>
-            <a:r>
-              <a:rPr lang="zh-TW" altLang="en-US" sz="4800" b="1" dirty="0" smtClean="0">
-                <a:latin typeface="Microsoft JhengHei" pitchFamily="34" charset="-120"/>
-                <a:ea typeface="Microsoft JhengHei" pitchFamily="34" charset="-120"/>
-              </a:rPr>
-              <a:t>能</a:t>
-            </a:r>
-            <a:r>
-              <a:rPr lang="en-US" altLang="zh-TW" sz="4800" b="1" dirty="0" smtClean="0">
+              <a:t>能不能</a:t>
+            </a:r>
+            <a:r>
+              <a:rPr lang="en-US" altLang="zh-TW" sz="4800" b="1" dirty="0">
                 <a:latin typeface="Microsoft JhengHei" pitchFamily="34" charset="-120"/>
                 <a:ea typeface="Microsoft JhengHei" pitchFamily="34" charset="-120"/>
               </a:rPr>
               <a:t>  </a:t>
             </a:r>
             <a:r>
-              <a:rPr lang="zh-TW" altLang="en-US" sz="4800" b="1" dirty="0" smtClean="0">
-                <a:latin typeface="Microsoft JhengHei" pitchFamily="34" charset="-120"/>
-                <a:ea typeface="Microsoft JhengHei" pitchFamily="34" charset="-120"/>
-              </a:rPr>
-              <a:t>就</a:t>
-            </a:r>
-            <a:r>
               <a:rPr lang="zh-TW" altLang="en-US" sz="4800" b="1" dirty="0">
                 <a:latin typeface="Microsoft JhengHei" pitchFamily="34" charset="-120"/>
                 <a:ea typeface="Microsoft JhengHei" pitchFamily="34" charset="-120"/>
               </a:rPr>
-              <a:t>讓我留在你的同在裡</a:t>
+              <a:t>就讓我留在你的同在裡</a:t>
             </a:r>
             <a:endParaRPr lang="en-US" altLang="zh-TW" sz="4800" b="1" dirty="0">
               <a:latin typeface="Microsoft JhengHei" pitchFamily="34" charset="-120"/>
@@ -3459,44 +3361,23 @@
                 <a:latin typeface="Microsoft JhengHei" pitchFamily="34" charset="-120"/>
                 <a:ea typeface="Microsoft JhengHei" pitchFamily="34" charset="-120"/>
               </a:rPr>
-              <a:t>能不</a:t>
-            </a:r>
-            <a:r>
-              <a:rPr lang="zh-TW" altLang="en-US" sz="4800" b="1" dirty="0" smtClean="0">
-                <a:latin typeface="Microsoft JhengHei" pitchFamily="34" charset="-120"/>
-                <a:ea typeface="Microsoft JhengHei" pitchFamily="34" charset="-120"/>
-              </a:rPr>
-              <a:t>能</a:t>
-            </a:r>
-            <a:r>
-              <a:rPr lang="en-US" altLang="zh-TW" sz="4800" b="1" dirty="0" smtClean="0">
+              <a:t>能不能</a:t>
+            </a:r>
+            <a:r>
+              <a:rPr lang="en-US" altLang="zh-TW" sz="4800" b="1" dirty="0">
                 <a:latin typeface="Microsoft JhengHei" pitchFamily="34" charset="-120"/>
                 <a:ea typeface="Microsoft JhengHei" pitchFamily="34" charset="-120"/>
               </a:rPr>
               <a:t>  </a:t>
             </a:r>
             <a:r>
-              <a:rPr lang="zh-TW" altLang="en-US" sz="4800" b="1" dirty="0" smtClean="0">
-                <a:latin typeface="Microsoft JhengHei" pitchFamily="34" charset="-120"/>
-                <a:ea typeface="Microsoft JhengHei" pitchFamily="34" charset="-120"/>
-              </a:rPr>
-              <a:t>賜</a:t>
-            </a:r>
-            <a:r>
               <a:rPr lang="zh-TW" altLang="en-US" sz="4800" b="1" dirty="0">
                 <a:latin typeface="Microsoft JhengHei" pitchFamily="34" charset="-120"/>
                 <a:ea typeface="Microsoft JhengHei" pitchFamily="34" charset="-120"/>
               </a:rPr>
-              <a:t>我力量讓我更多愛</a:t>
-            </a:r>
-            <a:r>
-              <a:rPr lang="zh-TW" altLang="en-US" sz="4800" b="1" dirty="0" smtClean="0">
-                <a:latin typeface="Microsoft JhengHei" pitchFamily="34" charset="-120"/>
-                <a:ea typeface="Microsoft JhengHei" pitchFamily="34" charset="-120"/>
-              </a:rPr>
-              <a:t>你</a:t>
-            </a:r>
-            <a:endParaRPr lang="en-US" altLang="zh-TW" sz="4800" b="1" dirty="0" smtClean="0">
+              <a:t>賜我力量讓我更多愛你</a:t>
+            </a:r>
+            <a:endParaRPr lang="en-US" altLang="zh-TW" sz="4800" b="1" dirty="0">
               <a:latin typeface="Microsoft JhengHei" pitchFamily="34" charset="-120"/>
               <a:ea typeface="Microsoft JhengHei" pitchFamily="34" charset="-120"/>
             </a:endParaRPr>
@@ -3526,19 +3407,8 @@
                 <a:latin typeface="Microsoft JhengHei" pitchFamily="34" charset="-120"/>
                 <a:ea typeface="Microsoft JhengHei" pitchFamily="34" charset="-120"/>
               </a:rPr>
-              <a:t>獻上敬拜  全心全意來愛</a:t>
-            </a:r>
-            <a:r>
-              <a:rPr lang="zh-TW" altLang="en-US" sz="4800" b="1" dirty="0" smtClean="0">
-                <a:latin typeface="Microsoft JhengHei" pitchFamily="34" charset="-120"/>
-                <a:ea typeface="Microsoft JhengHei" pitchFamily="34" charset="-120"/>
-              </a:rPr>
-              <a:t>你</a:t>
-            </a:r>
-            <a:endParaRPr lang="zh-TW" altLang="en-US" sz="4800" b="1" dirty="0">
-              <a:latin typeface="Microsoft JhengHei" pitchFamily="34" charset="-120"/>
-              <a:ea typeface="Microsoft JhengHei" pitchFamily="34" charset="-120"/>
-            </a:endParaRPr>
+              <a:t>獻上敬拜  全心全意來愛你</a:t>
+            </a:r>
           </a:p>
         </p:txBody>
       </p:sp>
